--- a/public/fun/pack/pptx/weddingpro/결혼식프리미엄_36_소개중심_앰버스모크.pptx
+++ b/public/fun/pack/pptx/weddingpro/결혼식프리미엄_36_소개중심_앰버스모크.pptx
@@ -113,12 +113,12 @@
   <p:extLst>
     <p:ext uri="{521415D9-36F7-43E2-AB2F-B90AF26B5E84}">
       <p14:sectionLst xmlns:p14="http://schemas.microsoft.com/office/powerpoint/2010/main">
-        <p14:section name="시작" id="{02CB7249-4BDD-4CAE-87B6-EE0ACBE5B380}">
+        <p14:section name="시작" id="{7615D6E8-50F1-4842-8C29-CD2C8C3CB4C8}">
           <p14:sldIdLst>
             <p14:sldId id="256"/>
           </p14:sldIdLst>
         </p14:section>
-        <p14:section name="본문" id="{47778805-D42A-41EB-AE00-D1961A206734}">
+        <p14:section name="본문" id="{D970AAAD-B739-479D-B510-05D6B12CE96A}">
           <p14:sldIdLst>
             <p14:sldId id="257"/>
             <p14:sldId id="258"/>
@@ -127,7 +127,7 @@
             <p14:sldId id="261"/>
           </p14:sldIdLst>
         </p14:section>
-        <p14:section name="마무리" id="{FCB57D84-2239-41CB-A211-B636D18E4540}">
+        <p14:section name="마무리" id="{AB927AF1-43D7-4F5C-9F20-D6780AF588BB}">
           <p14:sldIdLst>
             <p14:sldId id="262"/>
           </p14:sldIdLst>
@@ -1529,7 +1529,7 @@
             </a:lvl1pPr>
           </a:lstStyle>
           <a:p>
-            <a:fld id="{4C2DD9DB-47BD-4B04-ADDA-3DBF2BC94151}" type="slidenum">
+            <a:fld id="{609B6466-258E-47C9-A233-96E1B86D45A5}" type="slidenum">
               <a:rPr lang="en-US"/>
               <a:t>‹#›</a:t>
             </a:fld>
@@ -2268,7 +2268,7 @@
             </a:lvl1pPr>
           </a:lstStyle>
           <a:p>
-            <a:fld id="{D8A9D321-6889-4087-9432-BEEEAE8393ED}" type="slidenum">
+            <a:fld id="{5E34036B-CE39-4EA7-A2D8-D0DD35CCF728}" type="slidenum">
               <a:rPr lang="en-US"/>
               <a:t>‹#›</a:t>
             </a:fld>
@@ -3017,7 +3017,7 @@
             </a:lvl1pPr>
           </a:lstStyle>
           <a:p>
-            <a:fld id="{ED172FC3-CBB5-419C-A04F-44E0AC1029A8}" type="slidenum">
+            <a:fld id="{36785DEE-A6EC-4AF8-A49A-0716F1D2C0D3}" type="slidenum">
               <a:rPr lang="en-US"/>
               <a:t>‹#›</a:t>
             </a:fld>
@@ -3880,7 +3880,7 @@
           <a:p>
             <a:r>
               <a:rPr lang="ko-KR"/>
-              <a:t>가을에 결혼합니다</a:t>
+              <a:t>이제 부부가 됩니다</a:t>
             </a:r>
           </a:p>
         </p:txBody>
@@ -3908,7 +3908,7 @@
           <a:p>
             <a:r>
               <a:rPr lang="ko-KR"/>
-              <a:t>0000. 00. 00 · 예식장 이름</a:t>
+              <a:t>날짜 입력 · 예식장 이름</a:t>
             </a:r>
           </a:p>
         </p:txBody>
@@ -4151,7 +4151,7 @@
           <a:bodyPr/>
           <a:lstStyle/>
           <a:p>
-            <a:fld id="{68DE4DDE-8E46-4633-B310-669C5750441D}" type="slidenum">
+            <a:fld id="{61A8A09D-40E7-4A60-B5F0-1C259FCBD9CF}" type="slidenum">
               <a:rPr lang="en-US"/>
               <a:t>‹#›</a:t>
             </a:fld>
@@ -4619,7 +4619,7 @@
           <a:bodyPr/>
           <a:lstStyle/>
           <a:p>
-            <a:fld id="{69F85CEA-6D75-40BE-B9C7-587C0D8012F1}" type="slidenum">
+            <a:fld id="{5FF6F31F-3D68-4A3E-828E-58A57DD74160}" type="slidenum">
               <a:rPr lang="en-US"/>
               <a:t>‹#›</a:t>
             </a:fld>
@@ -5289,7 +5289,7 @@
           <a:bodyPr/>
           <a:lstStyle/>
           <a:p>
-            <a:fld id="{B0468F99-3083-43E6-A61B-77477E74D21D}" type="slidenum">
+            <a:fld id="{25ACD5CE-2C56-4C7B-A205-0E2D706E042B}" type="slidenum">
               <a:rPr lang="en-US"/>
               <a:t>‹#›</a:t>
             </a:fld>
@@ -6281,7 +6281,7 @@
           <a:bodyPr/>
           <a:lstStyle/>
           <a:p>
-            <a:fld id="{7C067D85-B63E-48C6-AE4A-938F08DCA68A}" type="slidenum">
+            <a:fld id="{840F933B-6CBD-44D5-B490-61D7A2A4CBD5}" type="slidenum">
               <a:rPr lang="en-US"/>
               <a:t>‹#›</a:t>
             </a:fld>
@@ -6391,7 +6391,7 @@
           <a:bodyPr/>
           <a:lstStyle/>
           <a:p>
-            <a:fld id="{E6CF8141-6882-4162-B2C4-3BFDDEF92C2E}" type="slidenum">
+            <a:fld id="{2056CB67-E51E-46EF-87A6-3889FBCA2259}" type="slidenum">
               <a:rPr lang="en-US"/>
               <a:t>‹#›</a:t>
             </a:fld>
